--- a/FFPM/FFPM 823.pptx
+++ b/FFPM/FFPM 823.pptx
@@ -112,6 +112,22 @@
       </a:defRPr>
     </a:lvl9pPr>
   </p:defaultTextStyle>
+  <p:extLst>
+    <p:ext uri="{EFAFB233-063F-42B5-8137-9DF3F51BA10A}">
+      <p15:sldGuideLst xmlns:p15="http://schemas.microsoft.com/office/powerpoint/2012/main">
+        <p15:guide id="1" orient="horz" pos="2160">
+          <p15:clr>
+            <a:srgbClr val="A4A3A4"/>
+          </p15:clr>
+        </p15:guide>
+        <p15:guide id="2" pos="3840">
+          <p15:clr>
+            <a:srgbClr val="A4A3A4"/>
+          </p15:clr>
+        </p15:guide>
+      </p15:sldGuideLst>
+    </p:ext>
+  </p:extLst>
 </p:presentation>
 </file>
 
@@ -246,7 +262,7 @@
           <a:p>
             <a:fld id="{661AEA81-24BC-4C1A-8529-B058F94030A8}" type="datetimeFigureOut">
               <a:rPr lang="fr-FR" smtClean="0"/>
-              <a:t>28/10/2014</a:t>
+              <a:t>15/02/2026</a:t>
             </a:fld>
             <a:endParaRPr lang="fr-FR"/>
           </a:p>
@@ -416,7 +432,7 @@
           <a:p>
             <a:fld id="{661AEA81-24BC-4C1A-8529-B058F94030A8}" type="datetimeFigureOut">
               <a:rPr lang="fr-FR" smtClean="0"/>
-              <a:t>28/10/2014</a:t>
+              <a:t>15/02/2026</a:t>
             </a:fld>
             <a:endParaRPr lang="fr-FR"/>
           </a:p>
@@ -596,7 +612,7 @@
           <a:p>
             <a:fld id="{661AEA81-24BC-4C1A-8529-B058F94030A8}" type="datetimeFigureOut">
               <a:rPr lang="fr-FR" smtClean="0"/>
-              <a:t>28/10/2014</a:t>
+              <a:t>15/02/2026</a:t>
             </a:fld>
             <a:endParaRPr lang="fr-FR"/>
           </a:p>
@@ -766,7 +782,7 @@
           <a:p>
             <a:fld id="{661AEA81-24BC-4C1A-8529-B058F94030A8}" type="datetimeFigureOut">
               <a:rPr lang="fr-FR" smtClean="0"/>
-              <a:t>28/10/2014</a:t>
+              <a:t>15/02/2026</a:t>
             </a:fld>
             <a:endParaRPr lang="fr-FR"/>
           </a:p>
@@ -1012,7 +1028,7 @@
           <a:p>
             <a:fld id="{661AEA81-24BC-4C1A-8529-B058F94030A8}" type="datetimeFigureOut">
               <a:rPr lang="fr-FR" smtClean="0"/>
-              <a:t>28/10/2014</a:t>
+              <a:t>15/02/2026</a:t>
             </a:fld>
             <a:endParaRPr lang="fr-FR"/>
           </a:p>
@@ -1244,7 +1260,7 @@
           <a:p>
             <a:fld id="{661AEA81-24BC-4C1A-8529-B058F94030A8}" type="datetimeFigureOut">
               <a:rPr lang="fr-FR" smtClean="0"/>
-              <a:t>28/10/2014</a:t>
+              <a:t>15/02/2026</a:t>
             </a:fld>
             <a:endParaRPr lang="fr-FR"/>
           </a:p>
@@ -1611,7 +1627,7 @@
           <a:p>
             <a:fld id="{661AEA81-24BC-4C1A-8529-B058F94030A8}" type="datetimeFigureOut">
               <a:rPr lang="fr-FR" smtClean="0"/>
-              <a:t>28/10/2014</a:t>
+              <a:t>15/02/2026</a:t>
             </a:fld>
             <a:endParaRPr lang="fr-FR"/>
           </a:p>
@@ -1729,7 +1745,7 @@
           <a:p>
             <a:fld id="{661AEA81-24BC-4C1A-8529-B058F94030A8}" type="datetimeFigureOut">
               <a:rPr lang="fr-FR" smtClean="0"/>
-              <a:t>28/10/2014</a:t>
+              <a:t>15/02/2026</a:t>
             </a:fld>
             <a:endParaRPr lang="fr-FR"/>
           </a:p>
@@ -1824,7 +1840,7 @@
           <a:p>
             <a:fld id="{661AEA81-24BC-4C1A-8529-B058F94030A8}" type="datetimeFigureOut">
               <a:rPr lang="fr-FR" smtClean="0"/>
-              <a:t>28/10/2014</a:t>
+              <a:t>15/02/2026</a:t>
             </a:fld>
             <a:endParaRPr lang="fr-FR"/>
           </a:p>
@@ -2101,7 +2117,7 @@
           <a:p>
             <a:fld id="{661AEA81-24BC-4C1A-8529-B058F94030A8}" type="datetimeFigureOut">
               <a:rPr lang="fr-FR" smtClean="0"/>
-              <a:t>28/10/2014</a:t>
+              <a:t>15/02/2026</a:t>
             </a:fld>
             <a:endParaRPr lang="fr-FR"/>
           </a:p>
@@ -2354,7 +2370,7 @@
           <a:p>
             <a:fld id="{661AEA81-24BC-4C1A-8529-B058F94030A8}" type="datetimeFigureOut">
               <a:rPr lang="fr-FR" smtClean="0"/>
-              <a:t>28/10/2014</a:t>
+              <a:t>15/02/2026</a:t>
             </a:fld>
             <a:endParaRPr lang="fr-FR"/>
           </a:p>
@@ -2567,7 +2583,7 @@
           <a:p>
             <a:fld id="{661AEA81-24BC-4C1A-8529-B058F94030A8}" type="datetimeFigureOut">
               <a:rPr lang="fr-FR" smtClean="0"/>
-              <a:t>28/10/2014</a:t>
+              <a:t>15/02/2026</a:t>
             </a:fld>
             <a:endParaRPr lang="fr-FR"/>
           </a:p>
@@ -3444,11 +3460,11 @@
             </a:br>
             <a:r>
               <a:rPr lang="fr-FR" sz="9600" b="1" dirty="0" err="1" smtClean="0"/>
-              <a:t>Tomp</a:t>
-            </a:r>
-            <a:r>
-              <a:rPr lang="fr-FR" sz="9600" b="1" dirty="0" smtClean="0"/>
-              <a:t> ô, Ray </a:t>
+              <a:t>Tompô</a:t>
+            </a:r>
+            <a:r>
+              <a:rPr lang="fr-FR" sz="9600" b="1" dirty="0" smtClean="0"/>
+              <a:t>, Ray </a:t>
             </a:r>
             <a:r>
               <a:rPr lang="fr-FR" sz="9600" b="1" dirty="0" err="1" smtClean="0"/>
@@ -3690,7 +3706,7 @@
         </p:spPr>
         <p:txBody>
           <a:bodyPr>
-            <a:normAutofit fontScale="90000"/>
+            <a:normAutofit/>
           </a:bodyPr>
           <a:lstStyle/>
           <a:p>
@@ -4486,7 +4502,7 @@
   <a:extraClrSchemeLst/>
   <a:extLst>
     <a:ext uri="{05A4C25C-085E-4340-85A3-A5531E510DB2}">
-      <thm15:themeFamily xmlns:thm15="http://schemas.microsoft.com/office/thememl/2012/main" xmlns="" name="Office Theme" id="{62F939B6-93AF-4DB8-9C6B-D6C7DFDC589F}" vid="{4A3C46E8-61CC-4603-A589-7422A47A8E4A}"/>
+      <thm15:themeFamily xmlns:thm15="http://schemas.microsoft.com/office/thememl/2012/main" name="Office Theme" id="{62F939B6-93AF-4DB8-9C6B-D6C7DFDC589F}" vid="{4A3C46E8-61CC-4603-A589-7422A47A8E4A}"/>
     </a:ext>
   </a:extLst>
 </a:theme>
